--- a/test/c_ec_up.pptx
+++ b/test/c_ec_up.pptx
@@ -3097,7 +3097,7 @@
         <p:spPr>
           <a:xfrm>
             <a:off x="0" y="0"/>
-            <a:ext cx="6849352" cy="6858000"/>
+            <a:ext cx="6858000" cy="3147218"/>
           </a:xfrm>
           <a:custGeom>
             <a:avLst/>
@@ -3106,387 +3106,1062 @@
             <a:cxnLst/>
             <a:rect l="l" t="t" r="r" b="b"/>
             <a:pathLst>
-              <a:path w="6849352" h="6858000">
+              <a:path w="6858000" h="3147218">
                 <a:moveTo>
-                  <a:pt x="0" y="4150936"/>
+                  <a:pt x="0" y="1904914"/>
                 </a:moveTo>
                 <a:lnTo>
-                  <a:pt x="5224" y="3856579"/>
-                </a:lnTo>
-                <a:lnTo>
-                  <a:pt x="20872" y="3563704"/>
-                </a:lnTo>
-                <a:lnTo>
-                  <a:pt x="46865" y="3273785"/>
-                </a:lnTo>
-                <a:lnTo>
-                  <a:pt x="83072" y="2988282"/>
-                </a:lnTo>
-                <a:lnTo>
-                  <a:pt x="129309" y="2708633"/>
-                </a:lnTo>
-                <a:lnTo>
-                  <a:pt x="185346" y="2436245"/>
-                </a:lnTo>
-                <a:lnTo>
-                  <a:pt x="250898" y="2172490"/>
-                </a:lnTo>
-                <a:lnTo>
-                  <a:pt x="325638" y="1918696"/>
-                </a:lnTo>
-                <a:lnTo>
-                  <a:pt x="409187" y="1676140"/>
-                </a:lnTo>
-                <a:lnTo>
-                  <a:pt x="501126" y="1446044"/>
-                </a:lnTo>
-                <a:lnTo>
-                  <a:pt x="600992" y="1229566"/>
-                </a:lnTo>
-                <a:lnTo>
-                  <a:pt x="708282" y="1027796"/>
-                </a:lnTo>
-                <a:lnTo>
-                  <a:pt x="822455" y="841749"/>
-                </a:lnTo>
-                <a:lnTo>
-                  <a:pt x="942937" y="672363"/>
-                </a:lnTo>
-                <a:lnTo>
-                  <a:pt x="1069121" y="520490"/>
-                </a:lnTo>
-                <a:lnTo>
-                  <a:pt x="1200373" y="386896"/>
-                </a:lnTo>
-                <a:lnTo>
-                  <a:pt x="1336031" y="272251"/>
-                </a:lnTo>
-                <a:lnTo>
-                  <a:pt x="1475411" y="177134"/>
-                </a:lnTo>
-                <a:lnTo>
-                  <a:pt x="1617814" y="102024"/>
-                </a:lnTo>
-                <a:lnTo>
-                  <a:pt x="1762521" y="47299"/>
-                </a:lnTo>
-                <a:lnTo>
-                  <a:pt x="1908804" y="13233"/>
-                </a:lnTo>
-                <a:lnTo>
-                  <a:pt x="2055927" y="0"/>
-                </a:lnTo>
-                <a:lnTo>
-                  <a:pt x="2203148" y="7664"/>
-                </a:lnTo>
-                <a:lnTo>
-                  <a:pt x="2349727" y="36189"/>
-                </a:lnTo>
-                <a:lnTo>
-                  <a:pt x="2494926" y="85429"/>
-                </a:lnTo>
-                <a:lnTo>
-                  <a:pt x="2638014" y="155138"/>
-                </a:lnTo>
-                <a:lnTo>
-                  <a:pt x="2778269" y="244964"/>
-                </a:lnTo>
-                <a:lnTo>
-                  <a:pt x="2914987" y="354455"/>
-                </a:lnTo>
-                <a:lnTo>
-                  <a:pt x="3047479" y="483060"/>
-                </a:lnTo>
-                <a:lnTo>
-                  <a:pt x="3175077" y="630131"/>
-                </a:lnTo>
-                <a:lnTo>
-                  <a:pt x="3297140" y="794928"/>
-                </a:lnTo>
-                <a:lnTo>
-                  <a:pt x="3413053" y="976621"/>
-                </a:lnTo>
-                <a:lnTo>
-                  <a:pt x="3522232" y="1174296"/>
-                </a:lnTo>
-                <a:lnTo>
-                  <a:pt x="3624127" y="1386956"/>
-                </a:lnTo>
-                <a:lnTo>
-                  <a:pt x="3718226" y="1613533"/>
-                </a:lnTo>
-                <a:lnTo>
-                  <a:pt x="3804055" y="1852884"/>
-                </a:lnTo>
-                <a:lnTo>
-                  <a:pt x="3881182" y="2103805"/>
-                </a:lnTo>
-                <a:lnTo>
-                  <a:pt x="3949218" y="2365032"/>
-                </a:lnTo>
-                <a:lnTo>
-                  <a:pt x="4007821" y="2635251"/>
-                </a:lnTo>
-                <a:lnTo>
-                  <a:pt x="4056696" y="2913101"/>
-                </a:lnTo>
-                <a:lnTo>
-                  <a:pt x="4095596" y="3197182"/>
-                </a:lnTo>
-                <a:lnTo>
-                  <a:pt x="4124327" y="3486066"/>
-                </a:lnTo>
-                <a:lnTo>
-                  <a:pt x="4142742" y="3778297"/>
-                </a:lnTo>
-                <a:lnTo>
-                  <a:pt x="4150751" y="4072404"/>
-                </a:lnTo>
-                <a:lnTo>
-                  <a:pt x="4148311" y="4366906"/>
-                </a:lnTo>
-                <a:lnTo>
-                  <a:pt x="4135436" y="4660321"/>
-                </a:lnTo>
-                <a:lnTo>
-                  <a:pt x="4112190" y="4951171"/>
-                </a:lnTo>
-                <a:lnTo>
-                  <a:pt x="4078691" y="5237993"/>
-                </a:lnTo>
-                <a:lnTo>
-                  <a:pt x="4035107" y="5519341"/>
-                </a:lnTo>
-                <a:lnTo>
-                  <a:pt x="4035107" y="5519341"/>
-                </a:lnTo>
-                <a:lnTo>
-                  <a:pt x="3997143" y="5720762"/>
-                </a:lnTo>
-                <a:lnTo>
-                  <a:pt x="3955949" y="5908704"/>
-                </a:lnTo>
-                <a:lnTo>
-                  <a:pt x="3911758" y="6082107"/>
-                </a:lnTo>
-                <a:lnTo>
-                  <a:pt x="3864818" y="6239993"/>
-                </a:lnTo>
-                <a:lnTo>
-                  <a:pt x="3815394" y="6381469"/>
-                </a:lnTo>
-                <a:lnTo>
-                  <a:pt x="3763767" y="6505740"/>
-                </a:lnTo>
-                <a:lnTo>
-                  <a:pt x="3710225" y="6612102"/>
-                </a:lnTo>
-                <a:lnTo>
-                  <a:pt x="3655073" y="6699956"/>
-                </a:lnTo>
-                <a:lnTo>
-                  <a:pt x="3598621" y="6768806"/>
-                </a:lnTo>
-                <a:lnTo>
-                  <a:pt x="3541187" y="6818265"/>
-                </a:lnTo>
-                <a:lnTo>
-                  <a:pt x="3483096" y="6848052"/>
-                </a:lnTo>
-                <a:lnTo>
-                  <a:pt x="3424676" y="6858000"/>
-                </a:lnTo>
-                <a:lnTo>
-                  <a:pt x="3366255" y="6848052"/>
-                </a:lnTo>
-                <a:lnTo>
-                  <a:pt x="3308164" y="6818265"/>
-                </a:lnTo>
-                <a:lnTo>
-                  <a:pt x="3250730" y="6768806"/>
-                </a:lnTo>
-                <a:lnTo>
-                  <a:pt x="3194278" y="6699956"/>
-                </a:lnTo>
-                <a:lnTo>
-                  <a:pt x="3139126" y="6612102"/>
-                </a:lnTo>
-                <a:lnTo>
-                  <a:pt x="3085585" y="6505740"/>
-                </a:lnTo>
-                <a:lnTo>
-                  <a:pt x="3033957" y="6381469"/>
-                </a:lnTo>
-                <a:lnTo>
-                  <a:pt x="2984534" y="6239993"/>
-                </a:lnTo>
-                <a:lnTo>
-                  <a:pt x="2937594" y="6082107"/>
-                </a:lnTo>
-                <a:lnTo>
-                  <a:pt x="2893402" y="5908704"/>
-                </a:lnTo>
-                <a:lnTo>
-                  <a:pt x="2852208" y="5720762"/>
-                </a:lnTo>
-                <a:lnTo>
-                  <a:pt x="2814244" y="5519341"/>
-                </a:lnTo>
-                <a:lnTo>
-                  <a:pt x="2814244" y="5519341"/>
-                </a:lnTo>
-                <a:lnTo>
-                  <a:pt x="2770660" y="5237993"/>
-                </a:lnTo>
-                <a:lnTo>
-                  <a:pt x="2737161" y="4951171"/>
-                </a:lnTo>
-                <a:lnTo>
-                  <a:pt x="2713915" y="4660321"/>
-                </a:lnTo>
-                <a:lnTo>
-                  <a:pt x="2701040" y="4366906"/>
-                </a:lnTo>
-                <a:lnTo>
-                  <a:pt x="2698601" y="4072404"/>
-                </a:lnTo>
-                <a:lnTo>
-                  <a:pt x="2706609" y="3778297"/>
-                </a:lnTo>
-                <a:lnTo>
-                  <a:pt x="2725025" y="3486066"/>
-                </a:lnTo>
-                <a:lnTo>
-                  <a:pt x="2753755" y="3197182"/>
-                </a:lnTo>
-                <a:lnTo>
-                  <a:pt x="2792656" y="2913101"/>
-                </a:lnTo>
-                <a:lnTo>
-                  <a:pt x="2841530" y="2635251"/>
-                </a:lnTo>
-                <a:lnTo>
-                  <a:pt x="2900133" y="2365032"/>
-                </a:lnTo>
-                <a:lnTo>
-                  <a:pt x="2968169" y="2103805"/>
-                </a:lnTo>
-                <a:lnTo>
-                  <a:pt x="3045296" y="1852884"/>
-                </a:lnTo>
-                <a:lnTo>
-                  <a:pt x="3131125" y="1613533"/>
-                </a:lnTo>
-                <a:lnTo>
-                  <a:pt x="3225224" y="1386956"/>
-                </a:lnTo>
-                <a:lnTo>
-                  <a:pt x="3327119" y="1174296"/>
-                </a:lnTo>
-                <a:lnTo>
-                  <a:pt x="3436298" y="976621"/>
-                </a:lnTo>
-                <a:lnTo>
-                  <a:pt x="3552211" y="794928"/>
-                </a:lnTo>
-                <a:lnTo>
-                  <a:pt x="3674274" y="630131"/>
-                </a:lnTo>
-                <a:lnTo>
-                  <a:pt x="3801872" y="483060"/>
-                </a:lnTo>
-                <a:lnTo>
-                  <a:pt x="3934364" y="354455"/>
-                </a:lnTo>
-                <a:lnTo>
-                  <a:pt x="4071082" y="244964"/>
-                </a:lnTo>
-                <a:lnTo>
-                  <a:pt x="4211338" y="155138"/>
-                </a:lnTo>
-                <a:lnTo>
-                  <a:pt x="4354425" y="85429"/>
-                </a:lnTo>
-                <a:lnTo>
-                  <a:pt x="4499624" y="36189"/>
-                </a:lnTo>
-                <a:lnTo>
-                  <a:pt x="4646203" y="7664"/>
-                </a:lnTo>
-                <a:lnTo>
-                  <a:pt x="4793424" y="0"/>
-                </a:lnTo>
-                <a:lnTo>
-                  <a:pt x="4940547" y="13233"/>
-                </a:lnTo>
-                <a:lnTo>
-                  <a:pt x="5086830" y="47299"/>
-                </a:lnTo>
-                <a:lnTo>
-                  <a:pt x="5231537" y="102024"/>
-                </a:lnTo>
-                <a:lnTo>
-                  <a:pt x="5373940" y="177134"/>
-                </a:lnTo>
-                <a:lnTo>
-                  <a:pt x="5513321" y="272251"/>
-                </a:lnTo>
-                <a:lnTo>
-                  <a:pt x="5648978" y="386896"/>
-                </a:lnTo>
-                <a:lnTo>
-                  <a:pt x="5780230" y="520490"/>
-                </a:lnTo>
-                <a:lnTo>
-                  <a:pt x="5906414" y="672363"/>
-                </a:lnTo>
-                <a:lnTo>
-                  <a:pt x="6026896" y="841749"/>
-                </a:lnTo>
-                <a:lnTo>
-                  <a:pt x="6141070" y="1027796"/>
-                </a:lnTo>
-                <a:lnTo>
-                  <a:pt x="6248359" y="1229566"/>
-                </a:lnTo>
-                <a:lnTo>
-                  <a:pt x="6348225" y="1446044"/>
-                </a:lnTo>
-                <a:lnTo>
-                  <a:pt x="6440164" y="1676140"/>
-                </a:lnTo>
-                <a:lnTo>
-                  <a:pt x="6523713" y="1918696"/>
-                </a:lnTo>
-                <a:lnTo>
-                  <a:pt x="6598453" y="2172490"/>
-                </a:lnTo>
-                <a:lnTo>
-                  <a:pt x="6664006" y="2436245"/>
-                </a:lnTo>
-                <a:lnTo>
-                  <a:pt x="6720042" y="2708633"/>
-                </a:lnTo>
-                <a:lnTo>
-                  <a:pt x="6766280" y="2988282"/>
-                </a:lnTo>
-                <a:lnTo>
-                  <a:pt x="6802486" y="3273785"/>
-                </a:lnTo>
-                <a:lnTo>
-                  <a:pt x="6828479" y="3563704"/>
-                </a:lnTo>
-                <a:lnTo>
-                  <a:pt x="6844127" y="3856579"/>
-                </a:lnTo>
-                <a:lnTo>
-                  <a:pt x="6849352" y="4150936"/>
+                  <a:pt x="2397" y="1769830"/>
+                </a:lnTo>
+                <a:lnTo>
+                  <a:pt x="9578" y="1635426"/>
+                </a:lnTo>
+                <a:lnTo>
+                  <a:pt x="21507" y="1502379"/>
+                </a:lnTo>
+                <a:lnTo>
+                  <a:pt x="38122" y="1371358"/>
+                </a:lnTo>
+                <a:lnTo>
+                  <a:pt x="59341" y="1243024"/>
+                </a:lnTo>
+                <a:lnTo>
+                  <a:pt x="85057" y="1118022"/>
+                </a:lnTo>
+                <a:lnTo>
+                  <a:pt x="115140" y="996982"/>
+                </a:lnTo>
+                <a:lnTo>
+                  <a:pt x="149439" y="880512"/>
+                </a:lnTo>
+                <a:lnTo>
+                  <a:pt x="187781" y="769201"/>
+                </a:lnTo>
+                <a:lnTo>
+                  <a:pt x="229973" y="663607"/>
+                </a:lnTo>
+                <a:lnTo>
+                  <a:pt x="275802" y="564262"/>
+                </a:lnTo>
+                <a:lnTo>
+                  <a:pt x="325039" y="471667"/>
+                </a:lnTo>
+                <a:lnTo>
+                  <a:pt x="377434" y="386289"/>
+                </a:lnTo>
+                <a:lnTo>
+                  <a:pt x="432725" y="308555"/>
+                </a:lnTo>
+                <a:lnTo>
+                  <a:pt x="490632" y="238859"/>
+                </a:lnTo>
+                <a:lnTo>
+                  <a:pt x="550865" y="177551"/>
+                </a:lnTo>
+                <a:lnTo>
+                  <a:pt x="613120" y="124939"/>
+                </a:lnTo>
+                <a:lnTo>
+                  <a:pt x="677084" y="81289"/>
+                </a:lnTo>
+                <a:lnTo>
+                  <a:pt x="742434" y="46820"/>
+                </a:lnTo>
+                <a:lnTo>
+                  <a:pt x="808842" y="21706"/>
+                </a:lnTo>
+                <a:lnTo>
+                  <a:pt x="875973" y="6073"/>
+                </a:lnTo>
+                <a:lnTo>
+                  <a:pt x="943489" y="0"/>
+                </a:lnTo>
+                <a:lnTo>
+                  <a:pt x="1011051" y="3517"/>
+                </a:lnTo>
+                <a:lnTo>
+                  <a:pt x="1078318" y="16607"/>
+                </a:lnTo>
+                <a:lnTo>
+                  <a:pt x="1144951" y="39204"/>
+                </a:lnTo>
+                <a:lnTo>
+                  <a:pt x="1210616" y="71194"/>
+                </a:lnTo>
+                <a:lnTo>
+                  <a:pt x="1274981" y="112417"/>
+                </a:lnTo>
+                <a:lnTo>
+                  <a:pt x="1337722" y="162663"/>
+                </a:lnTo>
+                <a:lnTo>
+                  <a:pt x="1398524" y="221682"/>
+                </a:lnTo>
+                <a:lnTo>
+                  <a:pt x="1457081" y="289174"/>
+                </a:lnTo>
+                <a:lnTo>
+                  <a:pt x="1513097" y="364802"/>
+                </a:lnTo>
+                <a:lnTo>
+                  <a:pt x="1566291" y="448183"/>
+                </a:lnTo>
+                <a:lnTo>
+                  <a:pt x="1616394" y="538898"/>
+                </a:lnTo>
+                <a:lnTo>
+                  <a:pt x="1663155" y="636491"/>
+                </a:lnTo>
+                <a:lnTo>
+                  <a:pt x="1706338" y="740469"/>
+                </a:lnTo>
+                <a:lnTo>
+                  <a:pt x="1745726" y="850310"/>
+                </a:lnTo>
+                <a:lnTo>
+                  <a:pt x="1781121" y="965461"/>
+                </a:lnTo>
+                <a:lnTo>
+                  <a:pt x="1812343" y="1085341"/>
+                </a:lnTo>
+                <a:lnTo>
+                  <a:pt x="1839237" y="1209348"/>
+                </a:lnTo>
+                <a:lnTo>
+                  <a:pt x="1861666" y="1336857"/>
+                </a:lnTo>
+                <a:lnTo>
+                  <a:pt x="1879518" y="1467225"/>
+                </a:lnTo>
+                <a:lnTo>
+                  <a:pt x="1892703" y="1599797"/>
+                </a:lnTo>
+                <a:lnTo>
+                  <a:pt x="1901154" y="1733905"/>
+                </a:lnTo>
+                <a:lnTo>
+                  <a:pt x="1904829" y="1868875"/>
+                </a:lnTo>
+                <a:lnTo>
+                  <a:pt x="1903710" y="2004025"/>
+                </a:lnTo>
+                <a:lnTo>
+                  <a:pt x="1897801" y="2138677"/>
+                </a:lnTo>
+                <a:lnTo>
+                  <a:pt x="1887133" y="2272152"/>
+                </a:lnTo>
+                <a:lnTo>
+                  <a:pt x="1871760" y="2403778"/>
+                </a:lnTo>
+                <a:lnTo>
+                  <a:pt x="1851759" y="2532892"/>
+                </a:lnTo>
+                <a:lnTo>
+                  <a:pt x="1851759" y="2532892"/>
+                </a:lnTo>
+                <a:lnTo>
+                  <a:pt x="1834337" y="2625326"/>
+                </a:lnTo>
+                <a:lnTo>
+                  <a:pt x="1815432" y="2711575"/>
+                </a:lnTo>
+                <a:lnTo>
+                  <a:pt x="1795152" y="2791152"/>
+                </a:lnTo>
+                <a:lnTo>
+                  <a:pt x="1773611" y="2863607"/>
+                </a:lnTo>
+                <a:lnTo>
+                  <a:pt x="1750930" y="2928533"/>
+                </a:lnTo>
+                <a:lnTo>
+                  <a:pt x="1727237" y="2985562"/>
+                </a:lnTo>
+                <a:lnTo>
+                  <a:pt x="1702667" y="3034373"/>
+                </a:lnTo>
+                <a:lnTo>
+                  <a:pt x="1677357" y="3074690"/>
+                </a:lnTo>
+                <a:lnTo>
+                  <a:pt x="1651450" y="3106286"/>
+                </a:lnTo>
+                <a:lnTo>
+                  <a:pt x="1625093" y="3128983"/>
+                </a:lnTo>
+                <a:lnTo>
+                  <a:pt x="1598434" y="3142653"/>
+                </a:lnTo>
+                <a:lnTo>
+                  <a:pt x="1571625" y="3147218"/>
+                </a:lnTo>
+                <a:lnTo>
+                  <a:pt x="1544815" y="3142653"/>
+                </a:lnTo>
+                <a:lnTo>
+                  <a:pt x="1518156" y="3128983"/>
+                </a:lnTo>
+                <a:lnTo>
+                  <a:pt x="1491799" y="3106286"/>
+                </a:lnTo>
+                <a:lnTo>
+                  <a:pt x="1465892" y="3074690"/>
+                </a:lnTo>
+                <a:lnTo>
+                  <a:pt x="1440582" y="3034373"/>
+                </a:lnTo>
+                <a:lnTo>
+                  <a:pt x="1416012" y="2985562"/>
+                </a:lnTo>
+                <a:lnTo>
+                  <a:pt x="1392319" y="2928533"/>
+                </a:lnTo>
+                <a:lnTo>
+                  <a:pt x="1369638" y="2863607"/>
+                </a:lnTo>
+                <a:lnTo>
+                  <a:pt x="1348097" y="2791152"/>
+                </a:lnTo>
+                <a:lnTo>
+                  <a:pt x="1327817" y="2711575"/>
+                </a:lnTo>
+                <a:lnTo>
+                  <a:pt x="1308912" y="2625326"/>
+                </a:lnTo>
+                <a:lnTo>
+                  <a:pt x="1291490" y="2532892"/>
+                </a:lnTo>
+                <a:lnTo>
+                  <a:pt x="1291490" y="2532892"/>
+                </a:lnTo>
+                <a:lnTo>
+                  <a:pt x="1269800" y="2391162"/>
+                </a:lnTo>
+                <a:lnTo>
+                  <a:pt x="1253686" y="2246488"/>
+                </a:lnTo>
+                <a:lnTo>
+                  <a:pt x="1243244" y="2099746"/>
+                </a:lnTo>
+                <a:lnTo>
+                  <a:pt x="1238538" y="1951825"/>
+                </a:lnTo>
+                <a:lnTo>
+                  <a:pt x="1239597" y="1803620"/>
+                </a:lnTo>
+                <a:lnTo>
+                  <a:pt x="1246414" y="1656028"/>
+                </a:lnTo>
+                <a:lnTo>
+                  <a:pt x="1258947" y="1509943"/>
+                </a:lnTo>
+                <a:lnTo>
+                  <a:pt x="1277122" y="1366248"/>
+                </a:lnTo>
+                <a:lnTo>
+                  <a:pt x="1300827" y="1225815"/>
+                </a:lnTo>
+                <a:lnTo>
+                  <a:pt x="1329919" y="1089493"/>
+                </a:lnTo>
+                <a:lnTo>
+                  <a:pt x="1364223" y="958107"/>
+                </a:lnTo>
+                <a:lnTo>
+                  <a:pt x="1403531" y="832453"/>
+                </a:lnTo>
+                <a:lnTo>
+                  <a:pt x="1447604" y="713292"/>
+                </a:lnTo>
+                <a:lnTo>
+                  <a:pt x="1496176" y="601344"/>
+                </a:lnTo>
+                <a:lnTo>
+                  <a:pt x="1548953" y="497288"/>
+                </a:lnTo>
+                <a:lnTo>
+                  <a:pt x="1605615" y="401753"/>
+                </a:lnTo>
+                <a:lnTo>
+                  <a:pt x="1665819" y="315318"/>
+                </a:lnTo>
+                <a:lnTo>
+                  <a:pt x="1729201" y="238506"/>
+                </a:lnTo>
+                <a:lnTo>
+                  <a:pt x="1795377" y="171782"/>
+                </a:lnTo>
+                <a:lnTo>
+                  <a:pt x="1863947" y="115550"/>
+                </a:lnTo>
+                <a:lnTo>
+                  <a:pt x="1934495" y="70150"/>
+                </a:lnTo>
+                <a:lnTo>
+                  <a:pt x="2006594" y="35858"/>
+                </a:lnTo>
+                <a:lnTo>
+                  <a:pt x="2079809" y="12880"/>
+                </a:lnTo>
+                <a:lnTo>
+                  <a:pt x="2153694" y="1356"/>
+                </a:lnTo>
+                <a:lnTo>
+                  <a:pt x="2227805" y="1356"/>
+                </a:lnTo>
+                <a:lnTo>
+                  <a:pt x="2301690" y="12880"/>
+                </a:lnTo>
+                <a:lnTo>
+                  <a:pt x="2374905" y="35858"/>
+                </a:lnTo>
+                <a:lnTo>
+                  <a:pt x="2447004" y="70150"/>
+                </a:lnTo>
+                <a:lnTo>
+                  <a:pt x="2517552" y="115550"/>
+                </a:lnTo>
+                <a:lnTo>
+                  <a:pt x="2586122" y="171782"/>
+                </a:lnTo>
+                <a:lnTo>
+                  <a:pt x="2652298" y="238506"/>
+                </a:lnTo>
+                <a:lnTo>
+                  <a:pt x="2715680" y="315318"/>
+                </a:lnTo>
+                <a:lnTo>
+                  <a:pt x="2775884" y="401753"/>
+                </a:lnTo>
+                <a:lnTo>
+                  <a:pt x="2832546" y="497288"/>
+                </a:lnTo>
+                <a:lnTo>
+                  <a:pt x="2885323" y="601344"/>
+                </a:lnTo>
+                <a:lnTo>
+                  <a:pt x="2933895" y="713292"/>
+                </a:lnTo>
+                <a:lnTo>
+                  <a:pt x="2977968" y="832453"/>
+                </a:lnTo>
+                <a:lnTo>
+                  <a:pt x="3017276" y="958107"/>
+                </a:lnTo>
+                <a:lnTo>
+                  <a:pt x="3051580" y="1089493"/>
+                </a:lnTo>
+                <a:lnTo>
+                  <a:pt x="3080672" y="1225815"/>
+                </a:lnTo>
+                <a:lnTo>
+                  <a:pt x="3104377" y="1366248"/>
+                </a:lnTo>
+                <a:lnTo>
+                  <a:pt x="3122552" y="1509943"/>
+                </a:lnTo>
+                <a:lnTo>
+                  <a:pt x="3135085" y="1656028"/>
+                </a:lnTo>
+                <a:lnTo>
+                  <a:pt x="3141902" y="1803620"/>
+                </a:lnTo>
+                <a:lnTo>
+                  <a:pt x="3142961" y="1951825"/>
+                </a:lnTo>
+                <a:lnTo>
+                  <a:pt x="3138255" y="2099746"/>
+                </a:lnTo>
+                <a:lnTo>
+                  <a:pt x="3127813" y="2246488"/>
+                </a:lnTo>
+                <a:lnTo>
+                  <a:pt x="3111699" y="2391162"/>
+                </a:lnTo>
+                <a:lnTo>
+                  <a:pt x="3090009" y="2532892"/>
+                </a:lnTo>
+                <a:lnTo>
+                  <a:pt x="3090009" y="2532892"/>
+                </a:lnTo>
+                <a:lnTo>
+                  <a:pt x="3072587" y="2625326"/>
+                </a:lnTo>
+                <a:lnTo>
+                  <a:pt x="3053682" y="2711575"/>
+                </a:lnTo>
+                <a:lnTo>
+                  <a:pt x="3033402" y="2791152"/>
+                </a:lnTo>
+                <a:lnTo>
+                  <a:pt x="3011861" y="2863607"/>
+                </a:lnTo>
+                <a:lnTo>
+                  <a:pt x="2989180" y="2928533"/>
+                </a:lnTo>
+                <a:lnTo>
+                  <a:pt x="2965487" y="2985562"/>
+                </a:lnTo>
+                <a:lnTo>
+                  <a:pt x="2940917" y="3034373"/>
+                </a:lnTo>
+                <a:lnTo>
+                  <a:pt x="2915607" y="3074690"/>
+                </a:lnTo>
+                <a:lnTo>
+                  <a:pt x="2889700" y="3106286"/>
+                </a:lnTo>
+                <a:lnTo>
+                  <a:pt x="2863343" y="3128983"/>
+                </a:lnTo>
+                <a:lnTo>
+                  <a:pt x="2836684" y="3142653"/>
+                </a:lnTo>
+                <a:lnTo>
+                  <a:pt x="2809875" y="3147218"/>
+                </a:lnTo>
+                <a:lnTo>
+                  <a:pt x="2783065" y="3142653"/>
+                </a:lnTo>
+                <a:lnTo>
+                  <a:pt x="2756406" y="3128983"/>
+                </a:lnTo>
+                <a:lnTo>
+                  <a:pt x="2730049" y="3106286"/>
+                </a:lnTo>
+                <a:lnTo>
+                  <a:pt x="2704142" y="3074690"/>
+                </a:lnTo>
+                <a:lnTo>
+                  <a:pt x="2678832" y="3034373"/>
+                </a:lnTo>
+                <a:lnTo>
+                  <a:pt x="2654262" y="2985562"/>
+                </a:lnTo>
+                <a:lnTo>
+                  <a:pt x="2630569" y="2928533"/>
+                </a:lnTo>
+                <a:lnTo>
+                  <a:pt x="2607888" y="2863607"/>
+                </a:lnTo>
+                <a:lnTo>
+                  <a:pt x="2586347" y="2791152"/>
+                </a:lnTo>
+                <a:lnTo>
+                  <a:pt x="2566067" y="2711575"/>
+                </a:lnTo>
+                <a:lnTo>
+                  <a:pt x="2547162" y="2625326"/>
+                </a:lnTo>
+                <a:lnTo>
+                  <a:pt x="2529740" y="2532892"/>
+                </a:lnTo>
+                <a:lnTo>
+                  <a:pt x="2529740" y="2532892"/>
+                </a:lnTo>
+                <a:lnTo>
+                  <a:pt x="2508050" y="2391162"/>
+                </a:lnTo>
+                <a:lnTo>
+                  <a:pt x="2491936" y="2246488"/>
+                </a:lnTo>
+                <a:lnTo>
+                  <a:pt x="2481494" y="2099746"/>
+                </a:lnTo>
+                <a:lnTo>
+                  <a:pt x="2476788" y="1951825"/>
+                </a:lnTo>
+                <a:lnTo>
+                  <a:pt x="2477847" y="1803620"/>
+                </a:lnTo>
+                <a:lnTo>
+                  <a:pt x="2484664" y="1656028"/>
+                </a:lnTo>
+                <a:lnTo>
+                  <a:pt x="2497197" y="1509943"/>
+                </a:lnTo>
+                <a:lnTo>
+                  <a:pt x="2515372" y="1366248"/>
+                </a:lnTo>
+                <a:lnTo>
+                  <a:pt x="2539077" y="1225815"/>
+                </a:lnTo>
+                <a:lnTo>
+                  <a:pt x="2568169" y="1089493"/>
+                </a:lnTo>
+                <a:lnTo>
+                  <a:pt x="2602473" y="958107"/>
+                </a:lnTo>
+                <a:lnTo>
+                  <a:pt x="2641781" y="832453"/>
+                </a:lnTo>
+                <a:lnTo>
+                  <a:pt x="2685854" y="713292"/>
+                </a:lnTo>
+                <a:lnTo>
+                  <a:pt x="2734426" y="601344"/>
+                </a:lnTo>
+                <a:lnTo>
+                  <a:pt x="2787203" y="497288"/>
+                </a:lnTo>
+                <a:lnTo>
+                  <a:pt x="2843865" y="401753"/>
+                </a:lnTo>
+                <a:lnTo>
+                  <a:pt x="2904069" y="315318"/>
+                </a:lnTo>
+                <a:lnTo>
+                  <a:pt x="2967451" y="238506"/>
+                </a:lnTo>
+                <a:lnTo>
+                  <a:pt x="3033627" y="171782"/>
+                </a:lnTo>
+                <a:lnTo>
+                  <a:pt x="3102197" y="115550"/>
+                </a:lnTo>
+                <a:lnTo>
+                  <a:pt x="3172745" y="70150"/>
+                </a:lnTo>
+                <a:lnTo>
+                  <a:pt x="3244844" y="35858"/>
+                </a:lnTo>
+                <a:lnTo>
+                  <a:pt x="3318059" y="12880"/>
+                </a:lnTo>
+                <a:lnTo>
+                  <a:pt x="3391944" y="1356"/>
+                </a:lnTo>
+                <a:lnTo>
+                  <a:pt x="3466055" y="1356"/>
+                </a:lnTo>
+                <a:lnTo>
+                  <a:pt x="3539940" y="12880"/>
+                </a:lnTo>
+                <a:lnTo>
+                  <a:pt x="3613155" y="35858"/>
+                </a:lnTo>
+                <a:lnTo>
+                  <a:pt x="3685254" y="70150"/>
+                </a:lnTo>
+                <a:lnTo>
+                  <a:pt x="3755802" y="115550"/>
+                </a:lnTo>
+                <a:lnTo>
+                  <a:pt x="3824372" y="171782"/>
+                </a:lnTo>
+                <a:lnTo>
+                  <a:pt x="3890548" y="238506"/>
+                </a:lnTo>
+                <a:lnTo>
+                  <a:pt x="3953930" y="315318"/>
+                </a:lnTo>
+                <a:lnTo>
+                  <a:pt x="4014134" y="401753"/>
+                </a:lnTo>
+                <a:lnTo>
+                  <a:pt x="4070796" y="497288"/>
+                </a:lnTo>
+                <a:lnTo>
+                  <a:pt x="4123573" y="601344"/>
+                </a:lnTo>
+                <a:lnTo>
+                  <a:pt x="4172145" y="713292"/>
+                </a:lnTo>
+                <a:lnTo>
+                  <a:pt x="4216218" y="832453"/>
+                </a:lnTo>
+                <a:lnTo>
+                  <a:pt x="4255526" y="958107"/>
+                </a:lnTo>
+                <a:lnTo>
+                  <a:pt x="4289830" y="1089493"/>
+                </a:lnTo>
+                <a:lnTo>
+                  <a:pt x="4318922" y="1225815"/>
+                </a:lnTo>
+                <a:lnTo>
+                  <a:pt x="4342627" y="1366248"/>
+                </a:lnTo>
+                <a:lnTo>
+                  <a:pt x="4360802" y="1509943"/>
+                </a:lnTo>
+                <a:lnTo>
+                  <a:pt x="4373335" y="1656028"/>
+                </a:lnTo>
+                <a:lnTo>
+                  <a:pt x="4380152" y="1803620"/>
+                </a:lnTo>
+                <a:lnTo>
+                  <a:pt x="4381211" y="1951825"/>
+                </a:lnTo>
+                <a:lnTo>
+                  <a:pt x="4376505" y="2099746"/>
+                </a:lnTo>
+                <a:lnTo>
+                  <a:pt x="4366063" y="2246488"/>
+                </a:lnTo>
+                <a:lnTo>
+                  <a:pt x="4349949" y="2391162"/>
+                </a:lnTo>
+                <a:lnTo>
+                  <a:pt x="4328259" y="2532892"/>
+                </a:lnTo>
+                <a:lnTo>
+                  <a:pt x="4328259" y="2532892"/>
+                </a:lnTo>
+                <a:lnTo>
+                  <a:pt x="4310837" y="2625326"/>
+                </a:lnTo>
+                <a:lnTo>
+                  <a:pt x="4291932" y="2711575"/>
+                </a:lnTo>
+                <a:lnTo>
+                  <a:pt x="4271652" y="2791152"/>
+                </a:lnTo>
+                <a:lnTo>
+                  <a:pt x="4250111" y="2863607"/>
+                </a:lnTo>
+                <a:lnTo>
+                  <a:pt x="4227430" y="2928533"/>
+                </a:lnTo>
+                <a:lnTo>
+                  <a:pt x="4203737" y="2985562"/>
+                </a:lnTo>
+                <a:lnTo>
+                  <a:pt x="4179167" y="3034373"/>
+                </a:lnTo>
+                <a:lnTo>
+                  <a:pt x="4153857" y="3074690"/>
+                </a:lnTo>
+                <a:lnTo>
+                  <a:pt x="4127950" y="3106286"/>
+                </a:lnTo>
+                <a:lnTo>
+                  <a:pt x="4101593" y="3128983"/>
+                </a:lnTo>
+                <a:lnTo>
+                  <a:pt x="4074934" y="3142653"/>
+                </a:lnTo>
+                <a:lnTo>
+                  <a:pt x="4048125" y="3147218"/>
+                </a:lnTo>
+                <a:lnTo>
+                  <a:pt x="4021315" y="3142653"/>
+                </a:lnTo>
+                <a:lnTo>
+                  <a:pt x="3994656" y="3128983"/>
+                </a:lnTo>
+                <a:lnTo>
+                  <a:pt x="3968299" y="3106286"/>
+                </a:lnTo>
+                <a:lnTo>
+                  <a:pt x="3942392" y="3074690"/>
+                </a:lnTo>
+                <a:lnTo>
+                  <a:pt x="3917082" y="3034373"/>
+                </a:lnTo>
+                <a:lnTo>
+                  <a:pt x="3892512" y="2985562"/>
+                </a:lnTo>
+                <a:lnTo>
+                  <a:pt x="3868819" y="2928533"/>
+                </a:lnTo>
+                <a:lnTo>
+                  <a:pt x="3846138" y="2863607"/>
+                </a:lnTo>
+                <a:lnTo>
+                  <a:pt x="3824597" y="2791152"/>
+                </a:lnTo>
+                <a:lnTo>
+                  <a:pt x="3804317" y="2711575"/>
+                </a:lnTo>
+                <a:lnTo>
+                  <a:pt x="3785412" y="2625326"/>
+                </a:lnTo>
+                <a:lnTo>
+                  <a:pt x="3767990" y="2532892"/>
+                </a:lnTo>
+                <a:lnTo>
+                  <a:pt x="3767990" y="2532892"/>
+                </a:lnTo>
+                <a:lnTo>
+                  <a:pt x="3746300" y="2391162"/>
+                </a:lnTo>
+                <a:lnTo>
+                  <a:pt x="3730186" y="2246488"/>
+                </a:lnTo>
+                <a:lnTo>
+                  <a:pt x="3719744" y="2099746"/>
+                </a:lnTo>
+                <a:lnTo>
+                  <a:pt x="3715038" y="1951825"/>
+                </a:lnTo>
+                <a:lnTo>
+                  <a:pt x="3716097" y="1803620"/>
+                </a:lnTo>
+                <a:lnTo>
+                  <a:pt x="3722914" y="1656028"/>
+                </a:lnTo>
+                <a:lnTo>
+                  <a:pt x="3735447" y="1509943"/>
+                </a:lnTo>
+                <a:lnTo>
+                  <a:pt x="3753622" y="1366248"/>
+                </a:lnTo>
+                <a:lnTo>
+                  <a:pt x="3777327" y="1225815"/>
+                </a:lnTo>
+                <a:lnTo>
+                  <a:pt x="3806419" y="1089493"/>
+                </a:lnTo>
+                <a:lnTo>
+                  <a:pt x="3840723" y="958107"/>
+                </a:lnTo>
+                <a:lnTo>
+                  <a:pt x="3880031" y="832453"/>
+                </a:lnTo>
+                <a:lnTo>
+                  <a:pt x="3924104" y="713292"/>
+                </a:lnTo>
+                <a:lnTo>
+                  <a:pt x="3972676" y="601344"/>
+                </a:lnTo>
+                <a:lnTo>
+                  <a:pt x="4025453" y="497288"/>
+                </a:lnTo>
+                <a:lnTo>
+                  <a:pt x="4082115" y="401753"/>
+                </a:lnTo>
+                <a:lnTo>
+                  <a:pt x="4142319" y="315318"/>
+                </a:lnTo>
+                <a:lnTo>
+                  <a:pt x="4205701" y="238506"/>
+                </a:lnTo>
+                <a:lnTo>
+                  <a:pt x="4271877" y="171782"/>
+                </a:lnTo>
+                <a:lnTo>
+                  <a:pt x="4340447" y="115550"/>
+                </a:lnTo>
+                <a:lnTo>
+                  <a:pt x="4410995" y="70150"/>
+                </a:lnTo>
+                <a:lnTo>
+                  <a:pt x="4483094" y="35858"/>
+                </a:lnTo>
+                <a:lnTo>
+                  <a:pt x="4556309" y="12880"/>
+                </a:lnTo>
+                <a:lnTo>
+                  <a:pt x="4630194" y="1356"/>
+                </a:lnTo>
+                <a:lnTo>
+                  <a:pt x="4704305" y="1356"/>
+                </a:lnTo>
+                <a:lnTo>
+                  <a:pt x="4778190" y="12880"/>
+                </a:lnTo>
+                <a:lnTo>
+                  <a:pt x="4851405" y="35858"/>
+                </a:lnTo>
+                <a:lnTo>
+                  <a:pt x="4923504" y="70150"/>
+                </a:lnTo>
+                <a:lnTo>
+                  <a:pt x="4994052" y="115550"/>
+                </a:lnTo>
+                <a:lnTo>
+                  <a:pt x="5062622" y="171782"/>
+                </a:lnTo>
+                <a:lnTo>
+                  <a:pt x="5128798" y="238506"/>
+                </a:lnTo>
+                <a:lnTo>
+                  <a:pt x="5192180" y="315318"/>
+                </a:lnTo>
+                <a:lnTo>
+                  <a:pt x="5252384" y="401753"/>
+                </a:lnTo>
+                <a:lnTo>
+                  <a:pt x="5309046" y="497288"/>
+                </a:lnTo>
+                <a:lnTo>
+                  <a:pt x="5361823" y="601344"/>
+                </a:lnTo>
+                <a:lnTo>
+                  <a:pt x="5410395" y="713292"/>
+                </a:lnTo>
+                <a:lnTo>
+                  <a:pt x="5454468" y="832453"/>
+                </a:lnTo>
+                <a:lnTo>
+                  <a:pt x="5493776" y="958107"/>
+                </a:lnTo>
+                <a:lnTo>
+                  <a:pt x="5528080" y="1089493"/>
+                </a:lnTo>
+                <a:lnTo>
+                  <a:pt x="5557172" y="1225815"/>
+                </a:lnTo>
+                <a:lnTo>
+                  <a:pt x="5580877" y="1366248"/>
+                </a:lnTo>
+                <a:lnTo>
+                  <a:pt x="5599052" y="1509943"/>
+                </a:lnTo>
+                <a:lnTo>
+                  <a:pt x="5611585" y="1656028"/>
+                </a:lnTo>
+                <a:lnTo>
+                  <a:pt x="5618402" y="1803620"/>
+                </a:lnTo>
+                <a:lnTo>
+                  <a:pt x="5619461" y="1951825"/>
+                </a:lnTo>
+                <a:lnTo>
+                  <a:pt x="5614755" y="2099746"/>
+                </a:lnTo>
+                <a:lnTo>
+                  <a:pt x="5604313" y="2246488"/>
+                </a:lnTo>
+                <a:lnTo>
+                  <a:pt x="5588199" y="2391162"/>
+                </a:lnTo>
+                <a:lnTo>
+                  <a:pt x="5566509" y="2532892"/>
+                </a:lnTo>
+                <a:lnTo>
+                  <a:pt x="5566509" y="2532892"/>
+                </a:lnTo>
+                <a:lnTo>
+                  <a:pt x="5549087" y="2625326"/>
+                </a:lnTo>
+                <a:lnTo>
+                  <a:pt x="5530182" y="2711575"/>
+                </a:lnTo>
+                <a:lnTo>
+                  <a:pt x="5509902" y="2791152"/>
+                </a:lnTo>
+                <a:lnTo>
+                  <a:pt x="5488361" y="2863607"/>
+                </a:lnTo>
+                <a:lnTo>
+                  <a:pt x="5465680" y="2928533"/>
+                </a:lnTo>
+                <a:lnTo>
+                  <a:pt x="5441987" y="2985562"/>
+                </a:lnTo>
+                <a:lnTo>
+                  <a:pt x="5417417" y="3034373"/>
+                </a:lnTo>
+                <a:lnTo>
+                  <a:pt x="5392107" y="3074690"/>
+                </a:lnTo>
+                <a:lnTo>
+                  <a:pt x="5366200" y="3106286"/>
+                </a:lnTo>
+                <a:lnTo>
+                  <a:pt x="5339843" y="3128983"/>
+                </a:lnTo>
+                <a:lnTo>
+                  <a:pt x="5313184" y="3142653"/>
+                </a:lnTo>
+                <a:lnTo>
+                  <a:pt x="5286375" y="3147218"/>
+                </a:lnTo>
+                <a:lnTo>
+                  <a:pt x="5259565" y="3142653"/>
+                </a:lnTo>
+                <a:lnTo>
+                  <a:pt x="5232906" y="3128983"/>
+                </a:lnTo>
+                <a:lnTo>
+                  <a:pt x="5206549" y="3106286"/>
+                </a:lnTo>
+                <a:lnTo>
+                  <a:pt x="5180642" y="3074690"/>
+                </a:lnTo>
+                <a:lnTo>
+                  <a:pt x="5155332" y="3034373"/>
+                </a:lnTo>
+                <a:lnTo>
+                  <a:pt x="5130762" y="2985562"/>
+                </a:lnTo>
+                <a:lnTo>
+                  <a:pt x="5107069" y="2928533"/>
+                </a:lnTo>
+                <a:lnTo>
+                  <a:pt x="5084388" y="2863607"/>
+                </a:lnTo>
+                <a:lnTo>
+                  <a:pt x="5062847" y="2791152"/>
+                </a:lnTo>
+                <a:lnTo>
+                  <a:pt x="5042567" y="2711575"/>
+                </a:lnTo>
+                <a:lnTo>
+                  <a:pt x="5023662" y="2625326"/>
+                </a:lnTo>
+                <a:lnTo>
+                  <a:pt x="5006240" y="2532892"/>
+                </a:lnTo>
+                <a:lnTo>
+                  <a:pt x="5006240" y="2532892"/>
+                </a:lnTo>
+                <a:lnTo>
+                  <a:pt x="4986239" y="2403778"/>
+                </a:lnTo>
+                <a:lnTo>
+                  <a:pt x="4970866" y="2272152"/>
+                </a:lnTo>
+                <a:lnTo>
+                  <a:pt x="4960198" y="2138677"/>
+                </a:lnTo>
+                <a:lnTo>
+                  <a:pt x="4954289" y="2004025"/>
+                </a:lnTo>
+                <a:lnTo>
+                  <a:pt x="4953170" y="1868875"/>
+                </a:lnTo>
+                <a:lnTo>
+                  <a:pt x="4956845" y="1733905"/>
+                </a:lnTo>
+                <a:lnTo>
+                  <a:pt x="4965296" y="1599797"/>
+                </a:lnTo>
+                <a:lnTo>
+                  <a:pt x="4978481" y="1467225"/>
+                </a:lnTo>
+                <a:lnTo>
+                  <a:pt x="4996333" y="1336857"/>
+                </a:lnTo>
+                <a:lnTo>
+                  <a:pt x="5018762" y="1209348"/>
+                </a:lnTo>
+                <a:lnTo>
+                  <a:pt x="5045656" y="1085341"/>
+                </a:lnTo>
+                <a:lnTo>
+                  <a:pt x="5076878" y="965461"/>
+                </a:lnTo>
+                <a:lnTo>
+                  <a:pt x="5112273" y="850310"/>
+                </a:lnTo>
+                <a:lnTo>
+                  <a:pt x="5151661" y="740469"/>
+                </a:lnTo>
+                <a:lnTo>
+                  <a:pt x="5194844" y="636491"/>
+                </a:lnTo>
+                <a:lnTo>
+                  <a:pt x="5241605" y="538898"/>
+                </a:lnTo>
+                <a:lnTo>
+                  <a:pt x="5291708" y="448183"/>
+                </a:lnTo>
+                <a:lnTo>
+                  <a:pt x="5344902" y="364802"/>
+                </a:lnTo>
+                <a:lnTo>
+                  <a:pt x="5400918" y="289174"/>
+                </a:lnTo>
+                <a:lnTo>
+                  <a:pt x="5459475" y="221682"/>
+                </a:lnTo>
+                <a:lnTo>
+                  <a:pt x="5520277" y="162663"/>
+                </a:lnTo>
+                <a:lnTo>
+                  <a:pt x="5583018" y="112417"/>
+                </a:lnTo>
+                <a:lnTo>
+                  <a:pt x="5647383" y="71194"/>
+                </a:lnTo>
+                <a:lnTo>
+                  <a:pt x="5713048" y="39204"/>
+                </a:lnTo>
+                <a:lnTo>
+                  <a:pt x="5779681" y="16607"/>
+                </a:lnTo>
+                <a:lnTo>
+                  <a:pt x="5846948" y="3517"/>
+                </a:lnTo>
+                <a:lnTo>
+                  <a:pt x="5914510" y="0"/>
+                </a:lnTo>
+                <a:lnTo>
+                  <a:pt x="5982026" y="6073"/>
+                </a:lnTo>
+                <a:lnTo>
+                  <a:pt x="6049157" y="21706"/>
+                </a:lnTo>
+                <a:lnTo>
+                  <a:pt x="6115565" y="46820"/>
+                </a:lnTo>
+                <a:lnTo>
+                  <a:pt x="6180915" y="81289"/>
+                </a:lnTo>
+                <a:lnTo>
+                  <a:pt x="6244879" y="124939"/>
+                </a:lnTo>
+                <a:lnTo>
+                  <a:pt x="6307134" y="177551"/>
+                </a:lnTo>
+                <a:lnTo>
+                  <a:pt x="6367367" y="238859"/>
+                </a:lnTo>
+                <a:lnTo>
+                  <a:pt x="6425274" y="308555"/>
+                </a:lnTo>
+                <a:lnTo>
+                  <a:pt x="6480565" y="386289"/>
+                </a:lnTo>
+                <a:lnTo>
+                  <a:pt x="6532960" y="471667"/>
+                </a:lnTo>
+                <a:lnTo>
+                  <a:pt x="6582197" y="564262"/>
+                </a:lnTo>
+                <a:lnTo>
+                  <a:pt x="6628026" y="663607"/>
+                </a:lnTo>
+                <a:lnTo>
+                  <a:pt x="6670218" y="769201"/>
+                </a:lnTo>
+                <a:lnTo>
+                  <a:pt x="6708560" y="880512"/>
+                </a:lnTo>
+                <a:lnTo>
+                  <a:pt x="6742859" y="996982"/>
+                </a:lnTo>
+                <a:lnTo>
+                  <a:pt x="6772942" y="1118022"/>
+                </a:lnTo>
+                <a:lnTo>
+                  <a:pt x="6798658" y="1243024"/>
+                </a:lnTo>
+                <a:lnTo>
+                  <a:pt x="6819877" y="1371358"/>
+                </a:lnTo>
+                <a:lnTo>
+                  <a:pt x="6836492" y="1502379"/>
+                </a:lnTo>
+                <a:lnTo>
+                  <a:pt x="6848421" y="1635426"/>
+                </a:lnTo>
+                <a:lnTo>
+                  <a:pt x="6855602" y="1769830"/>
+                </a:lnTo>
+                <a:lnTo>
+                  <a:pt x="6858000" y="1904914"/>
                 </a:lnTo>
               </a:path>
             </a:pathLst>
           </a:custGeom>
           <a:noFill/>
-          <a:ln w="4572">
+          <a:ln w="9144">
             <a:solidFill>
               <a:srgbClr val="0000FF"/>
             </a:solidFill>
